--- a/skills/milwaukee-ppt/assets/MS_Template.pptx
+++ b/skills/milwaukee-ppt/assets/MS_Template.pptx
@@ -566,8 +566,8 @@
         </p:nvSpPr>
         <p:spPr>
           <a:xfrm>
-            <a:off x="4663651" y="457200"/>
-            <a:ext cx="7524750" cy="381000"/>
+            <a:off x="4644601" y="457200"/>
+            <a:ext cx="7543800" cy="381000"/>
           </a:xfrm>
           <a:prstGeom prst="rect">
             <a:avLst/>
@@ -1190,8 +1190,8 @@
         </p:nvSpPr>
         <p:spPr>
           <a:xfrm>
-            <a:off x="4663651" y="457200"/>
-            <a:ext cx="7524750" cy="381000"/>
+            <a:off x="4644601" y="457200"/>
+            <a:ext cx="7543800" cy="381000"/>
           </a:xfrm>
           <a:prstGeom prst="rect">
             <a:avLst/>
@@ -2080,7 +2080,12 @@
             <p:ph type="body" sz="quarter" idx="10"/>
           </p:nvPr>
         </p:nvSpPr>
-        <p:spPr/>
+        <p:spPr>
+          <a:xfrm>
+            <a:off x="4644601" y="0"/>
+            <a:ext cx="7543800" cy="0"/>
+          </a:xfrm>
+        </p:spPr>
         <p:txBody>
           <a:bodyPr/>
           <a:lstStyle/>
@@ -2163,7 +2168,12 @@
             <p:ph type="body" sz="quarter" idx="10"/>
           </p:nvPr>
         </p:nvSpPr>
-        <p:spPr/>
+        <p:spPr>
+          <a:xfrm>
+            <a:off x="4644601" y="0"/>
+            <a:ext cx="7543800" cy="0"/>
+          </a:xfrm>
+        </p:spPr>
         <p:txBody>
           <a:bodyPr/>
           <a:lstStyle/>
